--- a/files/RWA進度更新.pptx
+++ b/files/RWA進度更新.pptx
@@ -5,7 +5,8 @@
     <p:sldMasterId id="2147483648" r:id="rId1"/>
   </p:sldMasterIdLst>
   <p:sldIdLst>
-    <p:sldId id="257" r:id="rId2"/>
+    <p:sldId id="289" r:id="rId2"/>
+    <p:sldId id="257" r:id="rId3"/>
   </p:sldIdLst>
   <p:sldSz cx="12192000" cy="6858000"/>
   <p:notesSz cx="6858000" cy="9144000"/>
@@ -42713,6 +42714,1144 @@
       </p:grpSpPr>
       <p:sp>
         <p:nvSpPr>
+          <p:cNvPr id="5" name="標題 4"/>
+          <p:cNvSpPr>
+            <a:spLocks noGrp="1"/>
+          </p:cNvSpPr>
+          <p:nvPr>
+            <p:ph type="title"/>
+          </p:nvPr>
+        </p:nvSpPr>
+        <p:spPr/>
+        <p:txBody>
+          <a:bodyPr/>
+          <a:lstStyle/>
+          <a:p>
+            <a:r>
+              <a:rPr lang="en-US" altLang="zh-TW" dirty="0"/>
+              <a:t>Recap: </a:t>
+            </a:r>
+            <a:r>
+              <a:rPr lang="zh-TW" altLang="en-US" dirty="0"/>
+              <a:t>主管機關</a:t>
+            </a:r>
+            <a:r>
+              <a:rPr lang="en-US" altLang="zh-TW" dirty="0"/>
+              <a:t>RWA</a:t>
+            </a:r>
+            <a:r>
+              <a:rPr lang="zh-TW" altLang="en-US" dirty="0"/>
+              <a:t>代幣平台規劃與擬真測試時程已出台</a:t>
+            </a:r>
+            <a:br>
+              <a:rPr lang="en-US" altLang="zh-TW" dirty="0"/>
+            </a:br>
+            <a:r>
+              <a:rPr lang="zh-TW" altLang="en-US" dirty="0"/>
+              <a:t>優先以</a:t>
+            </a:r>
+            <a:r>
+              <a:rPr lang="zh-TW" altLang="en-US" dirty="0">
+                <a:solidFill>
+                  <a:schemeClr val="accent1"/>
+                </a:solidFill>
+              </a:rPr>
+              <a:t>「黃金」定期定額</a:t>
+            </a:r>
+            <a:r>
+              <a:rPr lang="en-US" altLang="zh-TW" dirty="0">
+                <a:solidFill>
+                  <a:schemeClr val="accent1"/>
+                </a:solidFill>
+              </a:rPr>
+              <a:t>RWA</a:t>
+            </a:r>
+            <a:r>
+              <a:rPr lang="zh-TW" altLang="en-US" dirty="0"/>
+              <a:t>以及</a:t>
+            </a:r>
+            <a:r>
+              <a:rPr lang="zh-TW" altLang="en-US" dirty="0">
+                <a:solidFill>
+                  <a:schemeClr val="accent1"/>
+                </a:solidFill>
+              </a:rPr>
+              <a:t>「台幣債」 </a:t>
+            </a:r>
+            <a:r>
+              <a:rPr lang="en-US" altLang="zh-TW" dirty="0">
+                <a:solidFill>
+                  <a:schemeClr val="accent1"/>
+                </a:solidFill>
+              </a:rPr>
+              <a:t>RWA</a:t>
+            </a:r>
+            <a:r>
+              <a:rPr lang="zh-TW" altLang="en-US" dirty="0">
+                <a:solidFill>
+                  <a:schemeClr val="accent1"/>
+                </a:solidFill>
+              </a:rPr>
+              <a:t>為推動目標</a:t>
+            </a:r>
+          </a:p>
+        </p:txBody>
+      </p:sp>
+      <p:pic>
+        <p:nvPicPr>
+          <p:cNvPr id="8" name="圖片 7"/>
+          <p:cNvPicPr>
+            <a:picLocks noChangeAspect="1"/>
+          </p:cNvPicPr>
+          <p:nvPr/>
+        </p:nvPicPr>
+        <p:blipFill rotWithShape="1">
+          <a:blip r:embed="rId2"/>
+          <a:srcRect r="2990" b="55197"/>
+          <a:stretch/>
+        </p:blipFill>
+        <p:spPr>
+          <a:xfrm>
+            <a:off x="54318" y="1294472"/>
+            <a:ext cx="11700000" cy="3200181"/>
+          </a:xfrm>
+          <a:prstGeom prst="rect">
+            <a:avLst/>
+          </a:prstGeom>
+        </p:spPr>
+      </p:pic>
+      <p:grpSp>
+        <p:nvGrpSpPr>
+          <p:cNvPr id="3" name="群組 2"/>
+          <p:cNvGrpSpPr/>
+          <p:nvPr/>
+        </p:nvGrpSpPr>
+        <p:grpSpPr>
+          <a:xfrm>
+            <a:off x="2914725" y="4833538"/>
+            <a:ext cx="681083" cy="691611"/>
+            <a:chOff x="3104845" y="4308448"/>
+            <a:chExt cx="362425" cy="368027"/>
+          </a:xfrm>
+        </p:grpSpPr>
+        <p:sp>
+          <p:nvSpPr>
+            <p:cNvPr id="7" name="等腰三角形 6">
+              <a:extLst>
+                <a:ext uri="{FF2B5EF4-FFF2-40B4-BE49-F238E27FC236}">
+                  <a16:creationId xmlns:a16="http://schemas.microsoft.com/office/drawing/2014/main" id="{C5F34343-6328-0639-95D3-8F8F3DD266B1}"/>
+                </a:ext>
+              </a:extLst>
+            </p:cNvPr>
+            <p:cNvSpPr/>
+            <p:nvPr/>
+          </p:nvSpPr>
+          <p:spPr>
+            <a:xfrm rot="10800000">
+              <a:off x="3186639" y="4505066"/>
+              <a:ext cx="198835" cy="171409"/>
+            </a:xfrm>
+            <a:prstGeom prst="triangle">
+              <a:avLst/>
+            </a:prstGeom>
+            <a:ln>
+              <a:noFill/>
+            </a:ln>
+          </p:spPr>
+          <p:style>
+            <a:lnRef idx="2">
+              <a:schemeClr val="accent3">
+                <a:shade val="15000"/>
+              </a:schemeClr>
+            </a:lnRef>
+            <a:fillRef idx="1">
+              <a:schemeClr val="accent3"/>
+            </a:fillRef>
+            <a:effectRef idx="0">
+              <a:schemeClr val="accent3"/>
+            </a:effectRef>
+            <a:fontRef idx="minor">
+              <a:schemeClr val="lt1"/>
+            </a:fontRef>
+          </p:style>
+          <p:txBody>
+            <a:bodyPr rtlCol="0" anchor="ctr"/>
+            <a:lstStyle/>
+            <a:p>
+              <a:pPr algn="ctr"/>
+              <a:endParaRPr lang="zh-TW" altLang="en-US" sz="1400" b="1">
+                <a:solidFill>
+                  <a:srgbClr val="0070C0"/>
+                </a:solidFill>
+              </a:endParaRPr>
+            </a:p>
+          </p:txBody>
+        </p:sp>
+        <p:sp>
+          <p:nvSpPr>
+            <p:cNvPr id="9" name="文字方塊 8">
+              <a:extLst>
+                <a:ext uri="{FF2B5EF4-FFF2-40B4-BE49-F238E27FC236}">
+                  <a16:creationId xmlns:a16="http://schemas.microsoft.com/office/drawing/2014/main" id="{CD43C0CE-44F0-A4F8-F634-97EE75129321}"/>
+                </a:ext>
+              </a:extLst>
+            </p:cNvPr>
+            <p:cNvSpPr txBox="1"/>
+            <p:nvPr/>
+          </p:nvSpPr>
+          <p:spPr>
+            <a:xfrm>
+              <a:off x="3104845" y="4308448"/>
+              <a:ext cx="362425" cy="212911"/>
+            </a:xfrm>
+            <a:prstGeom prst="rect">
+              <a:avLst/>
+            </a:prstGeom>
+            <a:noFill/>
+          </p:spPr>
+          <p:txBody>
+            <a:bodyPr wrap="none" rtlCol="0">
+              <a:spAutoFit/>
+            </a:bodyPr>
+            <a:lstStyle/>
+            <a:p>
+              <a:r>
+                <a:rPr lang="en-US" altLang="zh-TW" sz="2000" b="1" dirty="0">
+                  <a:solidFill>
+                    <a:srgbClr val="0070C0"/>
+                  </a:solidFill>
+                </a:rPr>
+                <a:t>Now</a:t>
+              </a:r>
+              <a:endParaRPr lang="zh-TW" altLang="en-US" sz="2000" b="1" dirty="0">
+                <a:solidFill>
+                  <a:srgbClr val="0070C0"/>
+                </a:solidFill>
+              </a:endParaRPr>
+            </a:p>
+          </p:txBody>
+        </p:sp>
+      </p:grpSp>
+      <p:sp>
+        <p:nvSpPr>
+          <p:cNvPr id="4" name="矩形 3"/>
+          <p:cNvSpPr/>
+          <p:nvPr/>
+        </p:nvSpPr>
+        <p:spPr>
+          <a:xfrm>
+            <a:off x="799111" y="5531589"/>
+            <a:ext cx="4948518" cy="757130"/>
+          </a:xfrm>
+          <a:prstGeom prst="rect">
+            <a:avLst/>
+          </a:prstGeom>
+        </p:spPr>
+        <p:txBody>
+          <a:bodyPr wrap="square">
+            <a:spAutoFit/>
+          </a:bodyPr>
+          <a:lstStyle/>
+          <a:p>
+            <a:pPr algn="ctr">
+              <a:lnSpc>
+                <a:spcPct val="120000"/>
+              </a:lnSpc>
+            </a:pPr>
+            <a:r>
+              <a:rPr lang="zh-TW" altLang="en-US" b="1" dirty="0"/>
+              <a:t>目標成為首批參與國內金融聯盟鏈券商，搶先建立國內</a:t>
+            </a:r>
+            <a:r>
+              <a:rPr lang="en-US" altLang="zh-TW" b="1" dirty="0"/>
+              <a:t>RWA</a:t>
+            </a:r>
+            <a:r>
+              <a:rPr lang="zh-TW" altLang="en-US" b="1" dirty="0"/>
+              <a:t>銷售</a:t>
+            </a:r>
+            <a:r>
+              <a:rPr lang="zh-TW" altLang="en-US" b="1" dirty="0">
+                <a:latin typeface="微軟正黑體" panose="020B0604030504040204" pitchFamily="34" charset="-120"/>
+                <a:ea typeface="微軟正黑體" panose="020B0604030504040204" pitchFamily="34" charset="-120"/>
+              </a:rPr>
+              <a:t>、交易、系統串接</a:t>
+            </a:r>
+            <a:endParaRPr lang="en-US" altLang="zh-TW" b="1" dirty="0"/>
+          </a:p>
+        </p:txBody>
+      </p:sp>
+      <p:grpSp>
+        <p:nvGrpSpPr>
+          <p:cNvPr id="10" name="群組 9"/>
+          <p:cNvGrpSpPr/>
+          <p:nvPr/>
+        </p:nvGrpSpPr>
+        <p:grpSpPr>
+          <a:xfrm>
+            <a:off x="440626" y="2683166"/>
+            <a:ext cx="5479200" cy="2160000"/>
+            <a:chOff x="440626" y="2656007"/>
+            <a:chExt cx="5445586" cy="2136008"/>
+          </a:xfrm>
+        </p:grpSpPr>
+        <p:sp>
+          <p:nvSpPr>
+            <p:cNvPr id="2" name="矩形 1"/>
+            <p:cNvSpPr/>
+            <p:nvPr/>
+          </p:nvSpPr>
+          <p:spPr>
+            <a:xfrm>
+              <a:off x="440626" y="2673486"/>
+              <a:ext cx="5445586" cy="2118529"/>
+            </a:xfrm>
+            <a:prstGeom prst="rect">
+              <a:avLst/>
+            </a:prstGeom>
+            <a:solidFill>
+              <a:schemeClr val="tx1">
+                <a:lumMod val="65000"/>
+                <a:lumOff val="35000"/>
+              </a:schemeClr>
+            </a:solidFill>
+          </p:spPr>
+          <p:txBody>
+            <a:bodyPr wrap="square">
+              <a:spAutoFit/>
+            </a:bodyPr>
+            <a:lstStyle/>
+            <a:p>
+              <a:pPr>
+                <a:spcBef>
+                  <a:spcPts val="600"/>
+                </a:spcBef>
+                <a:spcAft>
+                  <a:spcPts val="1200"/>
+                </a:spcAft>
+              </a:pPr>
+              <a:r>
+                <a:rPr lang="zh-TW" altLang="en-US" b="1" dirty="0">
+                  <a:solidFill>
+                    <a:schemeClr val="bg1"/>
+                  </a:solidFill>
+                  <a:effectLst>
+                    <a:outerShdw blurRad="38100" dist="38100" dir="2700000" algn="tl">
+                      <a:srgbClr val="000000">
+                        <a:alpha val="43137"/>
+                      </a:srgbClr>
+                    </a:outerShdw>
+                  </a:effectLst>
+                  <a:latin typeface="微軟正黑體" panose="020B0604030504040204" pitchFamily="34" charset="-120"/>
+                  <a:ea typeface="微軟正黑體" panose="020B0604030504040204" pitchFamily="34" charset="-120"/>
+                </a:rPr>
+                <a:t>試辦一：發行美元計價短期公司債</a:t>
+              </a:r>
+            </a:p>
+            <a:p>
+              <a:pPr>
+                <a:spcAft>
+                  <a:spcPts val="400"/>
+                </a:spcAft>
+              </a:pPr>
+              <a:r>
+                <a:rPr lang="zh-TW" altLang="en-US" sz="1400" b="1" dirty="0">
+                  <a:solidFill>
+                    <a:schemeClr val="bg1"/>
+                  </a:solidFill>
+                  <a:latin typeface="微軟正黑體" panose="020B0604030504040204" pitchFamily="34" charset="-120"/>
+                  <a:ea typeface="微軟正黑體" panose="020B0604030504040204" pitchFamily="34" charset="-120"/>
+                </a:rPr>
+                <a:t>主要合作夥伴</a:t>
+              </a:r>
+              <a:r>
+                <a:rPr lang="zh-TW" altLang="en-US" sz="1400" dirty="0">
+                  <a:solidFill>
+                    <a:schemeClr val="bg1"/>
+                  </a:solidFill>
+                  <a:latin typeface="微軟正黑體" panose="020B0604030504040204" pitchFamily="34" charset="-120"/>
+                  <a:ea typeface="微軟正黑體" panose="020B0604030504040204" pitchFamily="34" charset="-120"/>
+                </a:rPr>
+                <a:t>：集保 </a:t>
+              </a:r>
+              <a:r>
+                <a:rPr lang="en-US" altLang="zh-TW" sz="1400" dirty="0">
+                  <a:solidFill>
+                    <a:schemeClr val="bg1"/>
+                  </a:solidFill>
+                  <a:latin typeface="Calibri" panose="020F0502020204030204" pitchFamily="34" charset="0"/>
+                  <a:ea typeface="微軟正黑體" panose="020B0604030504040204" pitchFamily="34" charset="-120"/>
+                </a:rPr>
+                <a:t>(RWA </a:t>
+              </a:r>
+              <a:r>
+                <a:rPr lang="zh-TW" altLang="en-US" sz="1400" dirty="0">
+                  <a:solidFill>
+                    <a:schemeClr val="bg1"/>
+                  </a:solidFill>
+                  <a:latin typeface="微軟正黑體" panose="020B0604030504040204" pitchFamily="34" charset="-120"/>
+                  <a:ea typeface="微軟正黑體" panose="020B0604030504040204" pitchFamily="34" charset="-120"/>
+                </a:rPr>
+                <a:t>代幣平台專案小組</a:t>
+              </a:r>
+              <a:r>
+                <a:rPr lang="en-US" altLang="zh-TW" sz="1400" dirty="0">
+                  <a:solidFill>
+                    <a:schemeClr val="bg1"/>
+                  </a:solidFill>
+                  <a:latin typeface="Calibri" panose="020F0502020204030204" pitchFamily="34" charset="0"/>
+                  <a:ea typeface="微軟正黑體" panose="020B0604030504040204" pitchFamily="34" charset="-120"/>
+                </a:rPr>
+                <a:t>)</a:t>
+              </a:r>
+            </a:p>
+            <a:p>
+              <a:pPr>
+                <a:spcAft>
+                  <a:spcPts val="400"/>
+                </a:spcAft>
+              </a:pPr>
+              <a:r>
+                <a:rPr lang="zh-TW" altLang="en-US" sz="1400" b="1" dirty="0">
+                  <a:solidFill>
+                    <a:schemeClr val="bg1"/>
+                  </a:solidFill>
+                  <a:latin typeface="微軟正黑體" panose="020B0604030504040204" pitchFamily="34" charset="-120"/>
+                  <a:ea typeface="微軟正黑體" panose="020B0604030504040204" pitchFamily="34" charset="-120"/>
+                </a:rPr>
+                <a:t>目標</a:t>
+              </a:r>
+              <a:r>
+                <a:rPr lang="zh-TW" altLang="en-US" sz="1400" dirty="0">
+                  <a:solidFill>
+                    <a:schemeClr val="bg1"/>
+                  </a:solidFill>
+                  <a:latin typeface="微軟正黑體" panose="020B0604030504040204" pitchFamily="34" charset="-120"/>
+                  <a:ea typeface="微軟正黑體" panose="020B0604030504040204" pitchFamily="34" charset="-120"/>
+                </a:rPr>
+                <a:t>：台灣首批</a:t>
+              </a:r>
+              <a:r>
+                <a:rPr lang="zh-TW" altLang="en-US" sz="1400" b="1" dirty="0">
+                  <a:solidFill>
+                    <a:schemeClr val="bg1"/>
+                  </a:solidFill>
+                  <a:latin typeface="微軟正黑體" panose="020B0604030504040204" pitchFamily="34" charset="-120"/>
+                  <a:ea typeface="微軟正黑體" panose="020B0604030504040204" pitchFamily="34" charset="-120"/>
+                </a:rPr>
+                <a:t>發行 </a:t>
+              </a:r>
+              <a:r>
+                <a:rPr lang="en-US" altLang="zh-TW" sz="1400" dirty="0">
+                  <a:solidFill>
+                    <a:schemeClr val="bg1"/>
+                  </a:solidFill>
+                  <a:latin typeface="Calibri" panose="020F0502020204030204" pitchFamily="34" charset="0"/>
+                  <a:ea typeface="微軟正黑體" panose="020B0604030504040204" pitchFamily="34" charset="-120"/>
+                </a:rPr>
+                <a:t>RWA </a:t>
+              </a:r>
+              <a:r>
+                <a:rPr lang="zh-TW" altLang="en-US" sz="1400" dirty="0">
+                  <a:solidFill>
+                    <a:schemeClr val="bg1"/>
+                  </a:solidFill>
+                  <a:latin typeface="微軟正黑體" panose="020B0604030504040204" pitchFamily="34" charset="-120"/>
+                  <a:ea typeface="微軟正黑體" panose="020B0604030504040204" pitchFamily="34" charset="-120"/>
+                </a:rPr>
+                <a:t>的金融機構</a:t>
+              </a:r>
+            </a:p>
+            <a:p>
+              <a:pPr>
+                <a:spcAft>
+                  <a:spcPts val="400"/>
+                </a:spcAft>
+              </a:pPr>
+              <a:r>
+                <a:rPr lang="zh-TW" altLang="en-US" sz="1400" b="1" dirty="0">
+                  <a:solidFill>
+                    <a:schemeClr val="bg1"/>
+                  </a:solidFill>
+                  <a:latin typeface="微軟正黑體" panose="020B0604030504040204" pitchFamily="34" charset="-120"/>
+                  <a:ea typeface="微軟正黑體" panose="020B0604030504040204" pitchFamily="34" charset="-120"/>
+                </a:rPr>
+                <a:t>變數</a:t>
+              </a:r>
+              <a:r>
+                <a:rPr lang="zh-TW" altLang="en-US" sz="1400" dirty="0">
+                  <a:solidFill>
+                    <a:schemeClr val="bg1"/>
+                  </a:solidFill>
+                  <a:latin typeface="微軟正黑體" panose="020B0604030504040204" pitchFamily="34" charset="-120"/>
+                  <a:ea typeface="微軟正黑體" panose="020B0604030504040204" pitchFamily="34" charset="-120"/>
+                </a:rPr>
+                <a:t>：主管機關傾向先推</a:t>
+              </a:r>
+              <a:r>
+                <a:rPr lang="zh-TW" altLang="en-US" sz="1400" b="1" dirty="0">
+                  <a:solidFill>
+                    <a:schemeClr val="bg1"/>
+                  </a:solidFill>
+                  <a:latin typeface="微軟正黑體" panose="020B0604030504040204" pitchFamily="34" charset="-120"/>
+                  <a:ea typeface="微軟正黑體" panose="020B0604030504040204" pitchFamily="34" charset="-120"/>
+                </a:rPr>
+                <a:t>台幣計價</a:t>
+              </a:r>
+              <a:r>
+                <a:rPr lang="zh-TW" altLang="en-US" sz="1400" dirty="0">
+                  <a:solidFill>
+                    <a:schemeClr val="bg1"/>
+                  </a:solidFill>
+                  <a:latin typeface="微軟正黑體" panose="020B0604030504040204" pitchFamily="34" charset="-120"/>
+                  <a:ea typeface="微軟正黑體" panose="020B0604030504040204" pitchFamily="34" charset="-120"/>
+                </a:rPr>
+                <a:t>、債券及黃金商品</a:t>
+              </a:r>
+            </a:p>
+            <a:p>
+              <a:pPr>
+                <a:spcAft>
+                  <a:spcPts val="400"/>
+                </a:spcAft>
+              </a:pPr>
+              <a:r>
+                <a:rPr lang="zh-TW" altLang="en-US" sz="1400" b="1" dirty="0">
+                  <a:solidFill>
+                    <a:schemeClr val="bg1"/>
+                  </a:solidFill>
+                  <a:latin typeface="微軟正黑體" panose="020B0604030504040204" pitchFamily="34" charset="-120"/>
+                  <a:ea typeface="微軟正黑體" panose="020B0604030504040204" pitchFamily="34" charset="-120"/>
+                </a:rPr>
+                <a:t>節奏</a:t>
+              </a:r>
+              <a:r>
+                <a:rPr lang="zh-TW" altLang="en-US" sz="1400" dirty="0">
+                  <a:solidFill>
+                    <a:schemeClr val="bg1"/>
+                  </a:solidFill>
+                  <a:latin typeface="微軟正黑體" panose="020B0604030504040204" pitchFamily="34" charset="-120"/>
+                  <a:ea typeface="微軟正黑體" panose="020B0604030504040204" pitchFamily="34" charset="-120"/>
+                </a:rPr>
+                <a:t>：</a:t>
+              </a:r>
+              <a:r>
+                <a:rPr lang="zh-TW" altLang="en-US" sz="1400" b="1" dirty="0">
+                  <a:solidFill>
+                    <a:schemeClr val="bg1"/>
+                  </a:solidFill>
+                  <a:latin typeface="微軟正黑體" panose="020B0604030504040204" pitchFamily="34" charset="-120"/>
+                  <a:ea typeface="微軟正黑體" panose="020B0604030504040204" pitchFamily="34" charset="-120"/>
+                </a:rPr>
+                <a:t>配合主管機關時程</a:t>
+              </a:r>
+              <a:r>
+                <a:rPr lang="zh-TW" altLang="en-US" sz="1400" dirty="0">
+                  <a:solidFill>
+                    <a:schemeClr val="bg1"/>
+                  </a:solidFill>
+                  <a:latin typeface="微軟正黑體" panose="020B0604030504040204" pitchFamily="34" charset="-120"/>
+                  <a:ea typeface="微軟正黑體" panose="020B0604030504040204" pitchFamily="34" charset="-120"/>
+                </a:rPr>
+                <a:t>，</a:t>
+              </a:r>
+              <a:r>
+                <a:rPr lang="en-US" altLang="zh-TW" sz="1400" dirty="0">
+                  <a:solidFill>
+                    <a:schemeClr val="bg1"/>
+                  </a:solidFill>
+                  <a:latin typeface="Calibri" panose="020F0502020204030204" pitchFamily="34" charset="0"/>
+                  <a:ea typeface="微軟正黑體" panose="020B0604030504040204" pitchFamily="34" charset="-120"/>
+                </a:rPr>
+                <a:t>KGIB/KGIS </a:t>
+              </a:r>
+              <a:r>
+                <a:rPr lang="zh-TW" altLang="en-US" sz="1400" dirty="0">
+                  <a:solidFill>
+                    <a:schemeClr val="bg1"/>
+                  </a:solidFill>
+                  <a:latin typeface="微軟正黑體" panose="020B0604030504040204" pitchFamily="34" charset="-120"/>
+                  <a:ea typeface="微軟正黑體" panose="020B0604030504040204" pitchFamily="34" charset="-120"/>
+                </a:rPr>
+                <a:t>需接入主管機關系統、集保有 </a:t>
+              </a:r>
+              <a:endParaRPr lang="en-US" altLang="zh-TW" sz="1400" dirty="0">
+                <a:solidFill>
+                  <a:schemeClr val="bg1"/>
+                </a:solidFill>
+                <a:latin typeface="微軟正黑體" panose="020B0604030504040204" pitchFamily="34" charset="-120"/>
+                <a:ea typeface="微軟正黑體" panose="020B0604030504040204" pitchFamily="34" charset="-120"/>
+              </a:endParaRPr>
+            </a:p>
+            <a:p>
+              <a:pPr>
+                <a:spcAft>
+                  <a:spcPts val="400"/>
+                </a:spcAft>
+              </a:pPr>
+              <a:r>
+                <a:rPr lang="en-US" altLang="zh-TW" sz="1400" dirty="0">
+                  <a:solidFill>
+                    <a:schemeClr val="bg1"/>
+                  </a:solidFill>
+                  <a:latin typeface="微軟正黑體" panose="020B0604030504040204" pitchFamily="34" charset="-120"/>
+                  <a:ea typeface="微軟正黑體" panose="020B0604030504040204" pitchFamily="34" charset="-120"/>
+                </a:rPr>
+                <a:t>            </a:t>
+              </a:r>
+              <a:r>
+                <a:rPr lang="zh-TW" altLang="en-US" sz="1400" dirty="0">
+                  <a:solidFill>
+                    <a:schemeClr val="bg1"/>
+                  </a:solidFill>
+                  <a:latin typeface="微軟正黑體" panose="020B0604030504040204" pitchFamily="34" charset="-120"/>
+                  <a:ea typeface="微軟正黑體" panose="020B0604030504040204" pitchFamily="34" charset="-120"/>
+                </a:rPr>
+                <a:t>委外銀行保管之可能性 </a:t>
+              </a:r>
+            </a:p>
+            <a:p>
+              <a:pPr>
+                <a:spcBef>
+                  <a:spcPts val="600"/>
+                </a:spcBef>
+              </a:pPr>
+              <a:r>
+                <a:rPr lang="zh-TW" altLang="en-US" sz="1200" b="1" u="sng" dirty="0">
+                  <a:solidFill>
+                    <a:schemeClr val="accent5"/>
+                  </a:solidFill>
+                  <a:latin typeface="微軟正黑體" panose="020B0604030504040204" pitchFamily="34" charset="-120"/>
+                  <a:ea typeface="微軟正黑體" panose="020B0604030504040204" pitchFamily="34" charset="-120"/>
+                </a:rPr>
+                <a:t>集保規格書已經出台，預計</a:t>
+              </a:r>
+              <a:r>
+                <a:rPr lang="en-US" altLang="zh-TW" sz="1200" b="1" u="sng" dirty="0">
+                  <a:solidFill>
+                    <a:schemeClr val="accent5"/>
+                  </a:solidFill>
+                  <a:latin typeface="Calibri" panose="020F0502020204030204" pitchFamily="34" charset="0"/>
+                  <a:ea typeface="微軟正黑體" panose="020B0604030504040204" pitchFamily="34" charset="-120"/>
+                </a:rPr>
+                <a:t>8</a:t>
+              </a:r>
+              <a:r>
+                <a:rPr lang="zh-TW" altLang="en-US" sz="1200" b="1" u="sng" dirty="0">
+                  <a:solidFill>
+                    <a:schemeClr val="accent5"/>
+                  </a:solidFill>
+                  <a:latin typeface="微軟正黑體" panose="020B0604030504040204" pitchFamily="34" charset="-120"/>
+                  <a:ea typeface="微軟正黑體" panose="020B0604030504040204" pitchFamily="34" charset="-120"/>
+                </a:rPr>
+                <a:t>月份集團與集保進行進一步討論，以評估推動策略</a:t>
+              </a:r>
+              <a:endParaRPr lang="zh-TW" altLang="en-US" sz="1200" b="1" u="sng" dirty="0">
+                <a:solidFill>
+                  <a:schemeClr val="accent5"/>
+                </a:solidFill>
+              </a:endParaRPr>
+            </a:p>
+          </p:txBody>
+        </p:sp>
+        <p:pic>
+          <p:nvPicPr>
+            <p:cNvPr id="6" name="圖片 5"/>
+            <p:cNvPicPr>
+              <a:picLocks noChangeAspect="1"/>
+            </p:cNvPicPr>
+            <p:nvPr/>
+          </p:nvPicPr>
+          <p:blipFill>
+            <a:blip r:embed="rId3">
+              <a:extLst>
+                <a:ext uri="{28A0092B-C50C-407E-A947-70E740481C1C}">
+                  <a14:useLocalDpi xmlns:a14="http://schemas.microsoft.com/office/drawing/2010/main" val="0"/>
+                </a:ext>
+              </a:extLst>
+            </a:blip>
+            <a:stretch>
+              <a:fillRect/>
+            </a:stretch>
+          </p:blipFill>
+          <p:spPr>
+            <a:xfrm>
+              <a:off x="4448424" y="2656007"/>
+              <a:ext cx="1409897" cy="323895"/>
+            </a:xfrm>
+            <a:prstGeom prst="rect">
+              <a:avLst/>
+            </a:prstGeom>
+          </p:spPr>
+        </p:pic>
+      </p:grpSp>
+      <p:grpSp>
+        <p:nvGrpSpPr>
+          <p:cNvPr id="13" name="群組 12"/>
+          <p:cNvGrpSpPr/>
+          <p:nvPr/>
+        </p:nvGrpSpPr>
+        <p:grpSpPr>
+          <a:xfrm>
+            <a:off x="6206937" y="2668405"/>
+            <a:ext cx="5482800" cy="2160000"/>
+            <a:chOff x="6404992" y="5306135"/>
+            <a:chExt cx="5550992" cy="1607376"/>
+          </a:xfrm>
+        </p:grpSpPr>
+        <p:sp>
+          <p:nvSpPr>
+            <p:cNvPr id="11" name="矩形 10"/>
+            <p:cNvSpPr/>
+            <p:nvPr/>
+          </p:nvSpPr>
+          <p:spPr>
+            <a:xfrm>
+              <a:off x="6404992" y="5343502"/>
+              <a:ext cx="5550992" cy="1570009"/>
+            </a:xfrm>
+            <a:prstGeom prst="rect">
+              <a:avLst/>
+            </a:prstGeom>
+            <a:gradFill flip="none" rotWithShape="1">
+              <a:gsLst>
+                <a:gs pos="0">
+                  <a:srgbClr val="0065B2">
+                    <a:shade val="30000"/>
+                    <a:satMod val="115000"/>
+                  </a:srgbClr>
+                </a:gs>
+                <a:gs pos="50000">
+                  <a:srgbClr val="0065B2">
+                    <a:shade val="67500"/>
+                    <a:satMod val="115000"/>
+                  </a:srgbClr>
+                </a:gs>
+                <a:gs pos="100000">
+                  <a:srgbClr val="0065B2">
+                    <a:shade val="100000"/>
+                    <a:satMod val="115000"/>
+                  </a:srgbClr>
+                </a:gs>
+              </a:gsLst>
+              <a:path path="circle">
+                <a:fillToRect l="100000" t="100000"/>
+              </a:path>
+              <a:tileRect r="-100000" b="-100000"/>
+            </a:gradFill>
+          </p:spPr>
+          <p:txBody>
+            <a:bodyPr wrap="square">
+              <a:spAutoFit/>
+            </a:bodyPr>
+            <a:lstStyle/>
+            <a:p>
+              <a:pPr>
+                <a:spcAft>
+                  <a:spcPts val="1200"/>
+                </a:spcAft>
+              </a:pPr>
+              <a:r>
+                <a:rPr lang="zh-TW" altLang="en-US" b="1" dirty="0">
+                  <a:solidFill>
+                    <a:schemeClr val="bg1"/>
+                  </a:solidFill>
+                  <a:effectLst>
+                    <a:outerShdw blurRad="38100" dist="38100" dir="2700000" algn="tl">
+                      <a:srgbClr val="000000">
+                        <a:alpha val="43137"/>
+                      </a:srgbClr>
+                    </a:outerShdw>
+                  </a:effectLst>
+                  <a:latin typeface="微軟正黑體" panose="020B0604030504040204" pitchFamily="34" charset="-120"/>
+                  <a:ea typeface="微軟正黑體" panose="020B0604030504040204" pitchFamily="34" charset="-120"/>
+                </a:rPr>
+                <a:t>試辦二：上架日本</a:t>
+              </a:r>
+              <a:r>
+                <a:rPr lang="en-US" altLang="zh-TW" b="1" dirty="0">
+                  <a:solidFill>
+                    <a:schemeClr val="bg1"/>
+                  </a:solidFill>
+                  <a:effectLst>
+                    <a:outerShdw blurRad="38100" dist="38100" dir="2700000" algn="tl">
+                      <a:srgbClr val="000000">
+                        <a:alpha val="43137"/>
+                      </a:srgbClr>
+                    </a:outerShdw>
+                  </a:effectLst>
+                  <a:latin typeface="Calibri" panose="020F0502020204030204" pitchFamily="34" charset="0"/>
+                  <a:ea typeface="微軟正黑體" panose="020B0604030504040204" pitchFamily="34" charset="-120"/>
+                </a:rPr>
+                <a:t>/</a:t>
+              </a:r>
+              <a:r>
+                <a:rPr lang="zh-TW" altLang="en-US" b="1" dirty="0">
+                  <a:solidFill>
+                    <a:schemeClr val="bg1"/>
+                  </a:solidFill>
+                  <a:effectLst>
+                    <a:outerShdw blurRad="38100" dist="38100" dir="2700000" algn="tl">
+                      <a:srgbClr val="000000">
+                        <a:alpha val="43137"/>
+                      </a:srgbClr>
+                    </a:outerShdw>
+                  </a:effectLst>
+                  <a:latin typeface="微軟正黑體" panose="020B0604030504040204" pitchFamily="34" charset="-120"/>
+                  <a:ea typeface="微軟正黑體" panose="020B0604030504040204" pitchFamily="34" charset="-120"/>
+                </a:rPr>
+                <a:t>新加坡商品</a:t>
+              </a:r>
+            </a:p>
+            <a:p>
+              <a:pPr>
+                <a:spcAft>
+                  <a:spcPts val="400"/>
+                </a:spcAft>
+              </a:pPr>
+              <a:r>
+                <a:rPr lang="zh-TW" altLang="en-US" sz="1400" b="1" dirty="0">
+                  <a:solidFill>
+                    <a:schemeClr val="bg1"/>
+                  </a:solidFill>
+                  <a:latin typeface="微軟正黑體" panose="020B0604030504040204" pitchFamily="34" charset="-120"/>
+                  <a:ea typeface="微軟正黑體" panose="020B0604030504040204" pitchFamily="34" charset="-120"/>
+                </a:rPr>
+                <a:t>主要合作夥伴：</a:t>
+              </a:r>
+              <a:r>
+                <a:rPr lang="en-US" altLang="zh-TW" sz="1400" dirty="0">
+                  <a:solidFill>
+                    <a:schemeClr val="bg1"/>
+                  </a:solidFill>
+                  <a:latin typeface="Calibri" panose="020F0502020204030204" pitchFamily="34" charset="0"/>
+                  <a:ea typeface="微軟正黑體" panose="020B0604030504040204" pitchFamily="34" charset="-120"/>
+                </a:rPr>
+                <a:t>SBI (</a:t>
+              </a:r>
+              <a:r>
+                <a:rPr lang="zh-TW" altLang="en-US" sz="1400" dirty="0">
+                  <a:solidFill>
+                    <a:schemeClr val="bg1"/>
+                  </a:solidFill>
+                  <a:latin typeface="微軟正黑體" panose="020B0604030504040204" pitchFamily="34" charset="-120"/>
+                  <a:ea typeface="微軟正黑體" panose="020B0604030504040204" pitchFamily="34" charset="-120"/>
+                </a:rPr>
+                <a:t>先限定專投、高資產、機構</a:t>
+              </a:r>
+              <a:r>
+                <a:rPr lang="en-US" altLang="zh-TW" sz="1400" dirty="0">
+                  <a:solidFill>
+                    <a:schemeClr val="bg1"/>
+                  </a:solidFill>
+                  <a:latin typeface="Calibri" panose="020F0502020204030204" pitchFamily="34" charset="0"/>
+                  <a:ea typeface="微軟正黑體" panose="020B0604030504040204" pitchFamily="34" charset="-120"/>
+                </a:rPr>
+                <a:t>)</a:t>
+              </a:r>
+            </a:p>
+            <a:p>
+              <a:pPr>
+                <a:spcAft>
+                  <a:spcPts val="400"/>
+                </a:spcAft>
+              </a:pPr>
+              <a:r>
+                <a:rPr lang="zh-TW" altLang="en-US" sz="1400" b="1" dirty="0">
+                  <a:solidFill>
+                    <a:schemeClr val="bg1"/>
+                  </a:solidFill>
+                  <a:latin typeface="微軟正黑體" panose="020B0604030504040204" pitchFamily="34" charset="-120"/>
+                  <a:ea typeface="微軟正黑體" panose="020B0604030504040204" pitchFamily="34" charset="-120"/>
+                </a:rPr>
+                <a:t>目標</a:t>
+              </a:r>
+              <a:r>
+                <a:rPr lang="zh-TW" altLang="en-US" sz="1400" dirty="0">
+                  <a:solidFill>
+                    <a:schemeClr val="bg1"/>
+                  </a:solidFill>
+                  <a:latin typeface="微軟正黑體" panose="020B0604030504040204" pitchFamily="34" charset="-120"/>
+                  <a:ea typeface="微軟正黑體" panose="020B0604030504040204" pitchFamily="34" charset="-120"/>
+                </a:rPr>
+                <a:t>：台灣首家</a:t>
+              </a:r>
+              <a:r>
+                <a:rPr lang="zh-TW" altLang="en-US" sz="1400" b="1" dirty="0">
+                  <a:solidFill>
+                    <a:schemeClr val="bg1"/>
+                  </a:solidFill>
+                  <a:latin typeface="微軟正黑體" panose="020B0604030504040204" pitchFamily="34" charset="-120"/>
+                  <a:ea typeface="微軟正黑體" panose="020B0604030504040204" pitchFamily="34" charset="-120"/>
+                </a:rPr>
+                <a:t>跨境銷售 </a:t>
+              </a:r>
+              <a:r>
+                <a:rPr lang="en-US" altLang="zh-TW" sz="1400" dirty="0">
+                  <a:solidFill>
+                    <a:schemeClr val="bg1"/>
+                  </a:solidFill>
+                  <a:latin typeface="Calibri" panose="020F0502020204030204" pitchFamily="34" charset="0"/>
+                  <a:ea typeface="微軟正黑體" panose="020B0604030504040204" pitchFamily="34" charset="-120"/>
+                </a:rPr>
+                <a:t>RWA </a:t>
+              </a:r>
+              <a:r>
+                <a:rPr lang="zh-TW" altLang="en-US" sz="1400" dirty="0">
+                  <a:solidFill>
+                    <a:schemeClr val="bg1"/>
+                  </a:solidFill>
+                  <a:latin typeface="微軟正黑體" panose="020B0604030504040204" pitchFamily="34" charset="-120"/>
+                  <a:ea typeface="微軟正黑體" panose="020B0604030504040204" pitchFamily="34" charset="-120"/>
+                </a:rPr>
+                <a:t>的金融機構</a:t>
+              </a:r>
+            </a:p>
+            <a:p>
+              <a:pPr>
+                <a:spcAft>
+                  <a:spcPts val="400"/>
+                </a:spcAft>
+              </a:pPr>
+              <a:r>
+                <a:rPr lang="zh-TW" altLang="en-US" sz="1400" b="1" dirty="0">
+                  <a:solidFill>
+                    <a:schemeClr val="bg1"/>
+                  </a:solidFill>
+                  <a:latin typeface="微軟正黑體" panose="020B0604030504040204" pitchFamily="34" charset="-120"/>
+                  <a:ea typeface="微軟正黑體" panose="020B0604030504040204" pitchFamily="34" charset="-120"/>
+                </a:rPr>
+                <a:t>政策契機：</a:t>
+              </a:r>
+              <a:r>
+                <a:rPr lang="en-US" altLang="zh-TW" sz="1400" dirty="0">
+                  <a:solidFill>
+                    <a:schemeClr val="bg1"/>
+                  </a:solidFill>
+                  <a:latin typeface="Calibri" panose="020F0502020204030204" pitchFamily="34" charset="0"/>
+                  <a:ea typeface="微軟正黑體" panose="020B0604030504040204" pitchFamily="34" charset="-120"/>
+                </a:rPr>
+                <a:t>ride on </a:t>
+              </a:r>
+              <a:r>
+                <a:rPr lang="zh-TW" altLang="en-US" sz="1400" dirty="0">
+                  <a:solidFill>
+                    <a:schemeClr val="bg1"/>
+                  </a:solidFill>
+                  <a:latin typeface="微軟正黑體" panose="020B0604030504040204" pitchFamily="34" charset="-120"/>
+                  <a:ea typeface="微軟正黑體" panose="020B0604030504040204" pitchFamily="34" charset="-120"/>
+                </a:rPr>
+                <a:t>「</a:t>
+              </a:r>
+              <a:r>
+                <a:rPr lang="zh-TW" altLang="en-US" sz="1400" b="1" dirty="0">
+                  <a:solidFill>
+                    <a:schemeClr val="bg1"/>
+                  </a:solidFill>
+                  <a:latin typeface="微軟正黑體" panose="020B0604030504040204" pitchFamily="34" charset="-120"/>
+                  <a:ea typeface="微軟正黑體" panose="020B0604030504040204" pitchFamily="34" charset="-120"/>
+                </a:rPr>
+                <a:t>資產管理</a:t>
+              </a:r>
+              <a:r>
+                <a:rPr lang="zh-TW" altLang="en-US" sz="1400" dirty="0">
+                  <a:solidFill>
+                    <a:schemeClr val="bg1"/>
+                  </a:solidFill>
+                  <a:latin typeface="Calibri" panose="020F0502020204030204" pitchFamily="34" charset="0"/>
+                  <a:ea typeface="微軟正黑體" panose="020B0604030504040204" pitchFamily="34" charset="-120"/>
+                </a:rPr>
+                <a:t>*</a:t>
+              </a:r>
+              <a:r>
+                <a:rPr lang="zh-TW" altLang="en-US" sz="1400" dirty="0">
+                  <a:solidFill>
+                    <a:schemeClr val="bg1"/>
+                  </a:solidFill>
+                  <a:latin typeface="微軟正黑體" panose="020B0604030504040204" pitchFamily="34" charset="-120"/>
+                  <a:ea typeface="微軟正黑體" panose="020B0604030504040204" pitchFamily="34" charset="-120"/>
+                </a:rPr>
+                <a:t>」新專法與</a:t>
+              </a:r>
+              <a:r>
+                <a:rPr lang="zh-TW" altLang="en-US" sz="1400" b="1" dirty="0">
+                  <a:solidFill>
+                    <a:schemeClr val="bg1"/>
+                  </a:solidFill>
+                  <a:latin typeface="微軟正黑體" panose="020B0604030504040204" pitchFamily="34" charset="-120"/>
+                  <a:ea typeface="微軟正黑體" panose="020B0604030504040204" pitchFamily="34" charset="-120"/>
+                </a:rPr>
+                <a:t>亞資中心</a:t>
+              </a:r>
+              <a:endParaRPr lang="zh-TW" altLang="en-US" sz="1400" dirty="0">
+                <a:solidFill>
+                  <a:schemeClr val="bg1"/>
+                </a:solidFill>
+                <a:latin typeface="微軟正黑體" panose="020B0604030504040204" pitchFamily="34" charset="-120"/>
+                <a:ea typeface="微軟正黑體" panose="020B0604030504040204" pitchFamily="34" charset="-120"/>
+              </a:endParaRPr>
+            </a:p>
+            <a:p>
+              <a:pPr>
+                <a:spcAft>
+                  <a:spcPts val="400"/>
+                </a:spcAft>
+              </a:pPr>
+              <a:r>
+                <a:rPr lang="zh-TW" altLang="en-US" sz="1400" b="1" dirty="0">
+                  <a:solidFill>
+                    <a:schemeClr val="bg1"/>
+                  </a:solidFill>
+                  <a:latin typeface="微軟正黑體" panose="020B0604030504040204" pitchFamily="34" charset="-120"/>
+                  <a:ea typeface="微軟正黑體" panose="020B0604030504040204" pitchFamily="34" charset="-120"/>
+                </a:rPr>
+                <a:t>節奏</a:t>
+              </a:r>
+              <a:r>
+                <a:rPr lang="zh-TW" altLang="en-US" sz="1400" dirty="0">
+                  <a:solidFill>
+                    <a:schemeClr val="bg1"/>
+                  </a:solidFill>
+                  <a:latin typeface="微軟正黑體" panose="020B0604030504040204" pitchFamily="34" charset="-120"/>
+                  <a:ea typeface="微軟正黑體" panose="020B0604030504040204" pitchFamily="34" charset="-120"/>
+                </a:rPr>
+                <a:t>：主動向主管機關 </a:t>
+              </a:r>
+              <a:r>
+                <a:rPr lang="en-US" altLang="zh-TW" sz="1400" b="1" dirty="0">
+                  <a:solidFill>
+                    <a:schemeClr val="bg1"/>
+                  </a:solidFill>
+                  <a:latin typeface="Calibri" panose="020F0502020204030204" pitchFamily="34" charset="0"/>
+                  <a:ea typeface="微軟正黑體" panose="020B0604030504040204" pitchFamily="34" charset="-120"/>
+                </a:rPr>
+                <a:t>lobby</a:t>
+              </a:r>
+              <a:endParaRPr lang="zh-TW" altLang="en-US" sz="1400" dirty="0">
+                <a:solidFill>
+                  <a:schemeClr val="bg1"/>
+                </a:solidFill>
+                <a:latin typeface="Calibri" panose="020F0502020204030204" pitchFamily="34" charset="0"/>
+                <a:ea typeface="微軟正黑體" panose="020B0604030504040204" pitchFamily="34" charset="-120"/>
+              </a:endParaRPr>
+            </a:p>
+            <a:p>
+              <a:pPr>
+                <a:spcBef>
+                  <a:spcPts val="1200"/>
+                </a:spcBef>
+              </a:pPr>
+              <a:r>
+                <a:rPr lang="en-US" altLang="zh-TW" sz="1100" dirty="0">
+                  <a:solidFill>
+                    <a:schemeClr val="bg1"/>
+                  </a:solidFill>
+                  <a:latin typeface="微軟正黑體" panose="020B0604030504040204" pitchFamily="34" charset="-120"/>
+                  <a:ea typeface="微軟正黑體" panose="020B0604030504040204" pitchFamily="34" charset="-120"/>
+                </a:rPr>
+                <a:t>※</a:t>
+              </a:r>
+              <a:r>
+                <a:rPr lang="zh-TW" altLang="en-US" sz="1100" dirty="0">
+                  <a:solidFill>
+                    <a:schemeClr val="bg1"/>
+                  </a:solidFill>
+                  <a:latin typeface="微軟正黑體" panose="020B0604030504040204" pitchFamily="34" charset="-120"/>
+                  <a:ea typeface="微軟正黑體" panose="020B0604030504040204" pitchFamily="34" charset="-120"/>
+                </a:rPr>
+                <a:t>資產管理專法預計</a:t>
+              </a:r>
+              <a:r>
+                <a:rPr lang="en-US" altLang="zh-TW" sz="1100" dirty="0">
+                  <a:solidFill>
+                    <a:schemeClr val="bg1"/>
+                  </a:solidFill>
+                  <a:latin typeface="Calibri" panose="020F0502020204030204" pitchFamily="34" charset="0"/>
+                  <a:ea typeface="微軟正黑體" panose="020B0604030504040204" pitchFamily="34" charset="-120"/>
+                </a:rPr>
+                <a:t>7</a:t>
+              </a:r>
+              <a:r>
+                <a:rPr lang="zh-TW" altLang="en-US" sz="1100" dirty="0">
+                  <a:solidFill>
+                    <a:schemeClr val="bg1"/>
+                  </a:solidFill>
+                  <a:latin typeface="微軟正黑體" panose="020B0604030504040204" pitchFamily="34" charset="-120"/>
+                  <a:ea typeface="微軟正黑體" panose="020B0604030504040204" pitchFamily="34" charset="-120"/>
+                </a:rPr>
+                <a:t>月底提出雛形，未來一張「資產管理執照」可跨業經營、管理各項資產產品，類似全委概念</a:t>
+              </a:r>
+              <a:endParaRPr lang="zh-TW" altLang="en-US" sz="1100" dirty="0">
+                <a:solidFill>
+                  <a:schemeClr val="bg1"/>
+                </a:solidFill>
+              </a:endParaRPr>
+            </a:p>
+          </p:txBody>
+        </p:sp>
+        <p:pic>
+          <p:nvPicPr>
+            <p:cNvPr id="12" name="圖片 11"/>
+            <p:cNvPicPr>
+              <a:picLocks/>
+            </p:cNvPicPr>
+            <p:nvPr/>
+          </p:nvPicPr>
+          <p:blipFill>
+            <a:blip r:embed="rId4">
+              <a:extLst>
+                <a:ext uri="{28A0092B-C50C-407E-A947-70E740481C1C}">
+                  <a14:useLocalDpi xmlns:a14="http://schemas.microsoft.com/office/drawing/2010/main" val="0"/>
+                </a:ext>
+              </a:extLst>
+            </a:blip>
+            <a:stretch>
+              <a:fillRect/>
+            </a:stretch>
+          </p:blipFill>
+          <p:spPr>
+            <a:xfrm>
+              <a:off x="10571108" y="5306135"/>
+              <a:ext cx="1312119" cy="294686"/>
+            </a:xfrm>
+            <a:prstGeom prst="rect">
+              <a:avLst/>
+            </a:prstGeom>
+          </p:spPr>
+        </p:pic>
+      </p:grpSp>
+    </p:spTree>
+    <p:extLst>
+      <p:ext uri="{BB962C8B-B14F-4D97-AF65-F5344CB8AC3E}">
+        <p14:creationId xmlns:p14="http://schemas.microsoft.com/office/powerpoint/2010/main" val="883752932"/>
+      </p:ext>
+    </p:extLst>
+  </p:cSld>
+  <p:clrMapOvr>
+    <a:masterClrMapping/>
+  </p:clrMapOvr>
+</p:sld>
+</file>
+
+<file path=ppt/slides/slide2.xml><?xml version="1.0" encoding="utf-8"?>
+<p:sld xmlns:a="http://schemas.openxmlformats.org/drawingml/2006/main" xmlns:r="http://schemas.openxmlformats.org/officeDocument/2006/relationships" xmlns:p="http://schemas.openxmlformats.org/presentationml/2006/main">
+  <p:cSld>
+    <p:spTree>
+      <p:nvGrpSpPr>
+        <p:cNvPr id="1" name=""/>
+        <p:cNvGrpSpPr/>
+        <p:nvPr/>
+      </p:nvGrpSpPr>
+      <p:grpSpPr>
+        <a:xfrm>
+          <a:off x="0" y="0"/>
+          <a:ext cx="0" cy="0"/>
+          <a:chOff x="0" y="0"/>
+          <a:chExt cx="0" cy="0"/>
+        </a:xfrm>
+      </p:grpSpPr>
+      <p:sp>
+        <p:nvSpPr>
           <p:cNvPr id="3" name="標題 2">
             <a:extLst>
               <a:ext uri="{FF2B5EF4-FFF2-40B4-BE49-F238E27FC236}">
